--- a/public/videos/repositories/storage-locker-near/storage-locker-near-tech-preview.pptx
+++ b/public/videos/repositories/storage-locker-near/storage-locker-near-tech-preview.pptx
@@ -134,7 +134,7 @@
           <p:cNvPr id="2" name="タイトル 1">
             <a:extLst>
               <a:ext uri="{FF2B5EF4-FFF2-40B4-BE49-F238E27FC236}">
-                <a16:creationId xmlns:a16="http://schemas.microsoft.com/office/drawing/2014/main" id="{B5AF4FA4-EC87-6A63-BBA0-23BB89F891F8}"/>
+                <a16:creationId xmlns:a16="http://schemas.microsoft.com/office/drawing/2014/main" id="{456BE28C-32B1-C85F-FAEA-68A036B34B17}"/>
               </a:ext>
             </a:extLst>
           </p:cNvPr>
@@ -171,7 +171,7 @@
           <p:cNvPr id="3" name="字幕 2">
             <a:extLst>
               <a:ext uri="{FF2B5EF4-FFF2-40B4-BE49-F238E27FC236}">
-                <a16:creationId xmlns:a16="http://schemas.microsoft.com/office/drawing/2014/main" id="{40C02B29-BE01-0EB5-E528-87B0AF37F947}"/>
+                <a16:creationId xmlns:a16="http://schemas.microsoft.com/office/drawing/2014/main" id="{F8231954-1D4C-2391-66B1-80B8F8323D8E}"/>
               </a:ext>
             </a:extLst>
           </p:cNvPr>
@@ -241,7 +241,7 @@
           <p:cNvPr id="4" name="日付プレースホルダー 3">
             <a:extLst>
               <a:ext uri="{FF2B5EF4-FFF2-40B4-BE49-F238E27FC236}">
-                <a16:creationId xmlns:a16="http://schemas.microsoft.com/office/drawing/2014/main" id="{FC853192-7B9E-09DB-D7AA-750F0F956CA5}"/>
+                <a16:creationId xmlns:a16="http://schemas.microsoft.com/office/drawing/2014/main" id="{9DB67F4C-4922-FF07-7DD7-626F4AE48304}"/>
               </a:ext>
             </a:extLst>
           </p:cNvPr>
@@ -257,7 +257,7 @@
           <a:bodyPr/>
           <a:lstStyle/>
           <a:p>
-            <a:fld id="{C8CCBFA7-525A-4827-A28E-A4D9C57E05D3}" type="datetimeFigureOut">
+            <a:fld id="{E827C3C9-F8F7-4661-9113-BC2CC4621ED4}" type="datetimeFigureOut">
               <a:rPr kumimoji="1" lang="ja-JP" altLang="en-US" smtClean="0"/>
               <a:t>2026/7/30</a:t>
             </a:fld>
@@ -270,7 +270,7 @@
           <p:cNvPr id="5" name="フッター プレースホルダー 4">
             <a:extLst>
               <a:ext uri="{FF2B5EF4-FFF2-40B4-BE49-F238E27FC236}">
-                <a16:creationId xmlns:a16="http://schemas.microsoft.com/office/drawing/2014/main" id="{4354F599-E4A9-8B08-1DEE-D4C6797D1947}"/>
+                <a16:creationId xmlns:a16="http://schemas.microsoft.com/office/drawing/2014/main" id="{4414886E-AB20-A414-E0F9-558C38ABBCE4}"/>
               </a:ext>
             </a:extLst>
           </p:cNvPr>
@@ -295,7 +295,7 @@
           <p:cNvPr id="6" name="スライド番号プレースホルダー 5">
             <a:extLst>
               <a:ext uri="{FF2B5EF4-FFF2-40B4-BE49-F238E27FC236}">
-                <a16:creationId xmlns:a16="http://schemas.microsoft.com/office/drawing/2014/main" id="{F36FE507-B404-007C-ED5E-5BD64A5C4CC0}"/>
+                <a16:creationId xmlns:a16="http://schemas.microsoft.com/office/drawing/2014/main" id="{780B8764-8FCC-9CA7-96C1-11F7A3E2A8B8}"/>
               </a:ext>
             </a:extLst>
           </p:cNvPr>
@@ -311,7 +311,7 @@
           <a:bodyPr/>
           <a:lstStyle/>
           <a:p>
-            <a:fld id="{017CA568-3FE1-4499-AF6E-C401A43EF1CE}" type="slidenum">
+            <a:fld id="{915B4113-59B7-4536-85E5-EAC956EFC6C8}" type="slidenum">
               <a:rPr kumimoji="1" lang="ja-JP" altLang="en-US" smtClean="0"/>
               <a:t>‹#›</a:t>
             </a:fld>
@@ -322,7 +322,7 @@
     </p:spTree>
     <p:extLst>
       <p:ext uri="{BB962C8B-B14F-4D97-AF65-F5344CB8AC3E}">
-        <p14:creationId xmlns:p14="http://schemas.microsoft.com/office/powerpoint/2010/main" val="684868309"/>
+        <p14:creationId xmlns:p14="http://schemas.microsoft.com/office/powerpoint/2010/main" val="3956647403"/>
       </p:ext>
     </p:extLst>
   </p:cSld>
@@ -354,7 +354,7 @@
           <p:cNvPr id="2" name="タイトル 1">
             <a:extLst>
               <a:ext uri="{FF2B5EF4-FFF2-40B4-BE49-F238E27FC236}">
-                <a16:creationId xmlns:a16="http://schemas.microsoft.com/office/drawing/2014/main" id="{3FC96DFF-93EA-1CFE-1B33-D089F1E8E194}"/>
+                <a16:creationId xmlns:a16="http://schemas.microsoft.com/office/drawing/2014/main" id="{40E9B83C-2E71-85F8-17C4-2F5A8DED2651}"/>
               </a:ext>
             </a:extLst>
           </p:cNvPr>
@@ -382,7 +382,7 @@
           <p:cNvPr id="3" name="縦書きテキスト プレースホルダー 2">
             <a:extLst>
               <a:ext uri="{FF2B5EF4-FFF2-40B4-BE49-F238E27FC236}">
-                <a16:creationId xmlns:a16="http://schemas.microsoft.com/office/drawing/2014/main" id="{EFF6989A-42E9-6982-E0A7-110BEC9836C7}"/>
+                <a16:creationId xmlns:a16="http://schemas.microsoft.com/office/drawing/2014/main" id="{BDE11803-4651-1DF1-89F7-6FC1B43374CC}"/>
               </a:ext>
             </a:extLst>
           </p:cNvPr>
@@ -471,7 +471,7 @@
           <p:cNvPr id="4" name="日付プレースホルダー 3">
             <a:extLst>
               <a:ext uri="{FF2B5EF4-FFF2-40B4-BE49-F238E27FC236}">
-                <a16:creationId xmlns:a16="http://schemas.microsoft.com/office/drawing/2014/main" id="{B151EEA7-E0BA-E63B-024B-70826B98BC26}"/>
+                <a16:creationId xmlns:a16="http://schemas.microsoft.com/office/drawing/2014/main" id="{65DE631F-0EBD-47EF-0163-4F107A96D366}"/>
               </a:ext>
             </a:extLst>
           </p:cNvPr>
@@ -487,7 +487,7 @@
           <a:bodyPr/>
           <a:lstStyle/>
           <a:p>
-            <a:fld id="{C8CCBFA7-525A-4827-A28E-A4D9C57E05D3}" type="datetimeFigureOut">
+            <a:fld id="{E827C3C9-F8F7-4661-9113-BC2CC4621ED4}" type="datetimeFigureOut">
               <a:rPr kumimoji="1" lang="ja-JP" altLang="en-US" smtClean="0"/>
               <a:t>2026/7/30</a:t>
             </a:fld>
@@ -500,7 +500,7 @@
           <p:cNvPr id="5" name="フッター プレースホルダー 4">
             <a:extLst>
               <a:ext uri="{FF2B5EF4-FFF2-40B4-BE49-F238E27FC236}">
-                <a16:creationId xmlns:a16="http://schemas.microsoft.com/office/drawing/2014/main" id="{CC24176C-99D8-5BAB-2338-D11F1DCD3CF8}"/>
+                <a16:creationId xmlns:a16="http://schemas.microsoft.com/office/drawing/2014/main" id="{1283EF5D-0192-564B-622C-F1B5B198BDEA}"/>
               </a:ext>
             </a:extLst>
           </p:cNvPr>
@@ -525,7 +525,7 @@
           <p:cNvPr id="6" name="スライド番号プレースホルダー 5">
             <a:extLst>
               <a:ext uri="{FF2B5EF4-FFF2-40B4-BE49-F238E27FC236}">
-                <a16:creationId xmlns:a16="http://schemas.microsoft.com/office/drawing/2014/main" id="{88164D1F-4FFF-E198-3EFA-7AA12D886B36}"/>
+                <a16:creationId xmlns:a16="http://schemas.microsoft.com/office/drawing/2014/main" id="{6B3527BC-BD54-009E-3F21-8865A9D8365D}"/>
               </a:ext>
             </a:extLst>
           </p:cNvPr>
@@ -541,7 +541,7 @@
           <a:bodyPr/>
           <a:lstStyle/>
           <a:p>
-            <a:fld id="{017CA568-3FE1-4499-AF6E-C401A43EF1CE}" type="slidenum">
+            <a:fld id="{915B4113-59B7-4536-85E5-EAC956EFC6C8}" type="slidenum">
               <a:rPr kumimoji="1" lang="ja-JP" altLang="en-US" smtClean="0"/>
               <a:t>‹#›</a:t>
             </a:fld>
@@ -552,7 +552,7 @@
     </p:spTree>
     <p:extLst>
       <p:ext uri="{BB962C8B-B14F-4D97-AF65-F5344CB8AC3E}">
-        <p14:creationId xmlns:p14="http://schemas.microsoft.com/office/powerpoint/2010/main" val="57190244"/>
+        <p14:creationId xmlns:p14="http://schemas.microsoft.com/office/powerpoint/2010/main" val="3339302724"/>
       </p:ext>
     </p:extLst>
   </p:cSld>
@@ -584,7 +584,7 @@
           <p:cNvPr id="2" name="縦書きタイトル 1">
             <a:extLst>
               <a:ext uri="{FF2B5EF4-FFF2-40B4-BE49-F238E27FC236}">
-                <a16:creationId xmlns:a16="http://schemas.microsoft.com/office/drawing/2014/main" id="{DDC902EE-7D3A-19F5-7DB7-34A9077E6893}"/>
+                <a16:creationId xmlns:a16="http://schemas.microsoft.com/office/drawing/2014/main" id="{85E6348F-1C02-72A4-ED0A-79273DA249EB}"/>
               </a:ext>
             </a:extLst>
           </p:cNvPr>
@@ -617,7 +617,7 @@
           <p:cNvPr id="3" name="縦書きテキスト プレースホルダー 2">
             <a:extLst>
               <a:ext uri="{FF2B5EF4-FFF2-40B4-BE49-F238E27FC236}">
-                <a16:creationId xmlns:a16="http://schemas.microsoft.com/office/drawing/2014/main" id="{C7936F56-1188-5791-A7DB-3E0DCFE564F5}"/>
+                <a16:creationId xmlns:a16="http://schemas.microsoft.com/office/drawing/2014/main" id="{7A3EF40E-9B61-9810-CEF2-059526A7CF23}"/>
               </a:ext>
             </a:extLst>
           </p:cNvPr>
@@ -711,7 +711,7 @@
           <p:cNvPr id="4" name="日付プレースホルダー 3">
             <a:extLst>
               <a:ext uri="{FF2B5EF4-FFF2-40B4-BE49-F238E27FC236}">
-                <a16:creationId xmlns:a16="http://schemas.microsoft.com/office/drawing/2014/main" id="{F28211BB-C865-98B3-4A8B-95737302E2A0}"/>
+                <a16:creationId xmlns:a16="http://schemas.microsoft.com/office/drawing/2014/main" id="{ADF941DF-4600-E4CF-89A9-FDF05DA2775C}"/>
               </a:ext>
             </a:extLst>
           </p:cNvPr>
@@ -727,7 +727,7 @@
           <a:bodyPr/>
           <a:lstStyle/>
           <a:p>
-            <a:fld id="{C8CCBFA7-525A-4827-A28E-A4D9C57E05D3}" type="datetimeFigureOut">
+            <a:fld id="{E827C3C9-F8F7-4661-9113-BC2CC4621ED4}" type="datetimeFigureOut">
               <a:rPr kumimoji="1" lang="ja-JP" altLang="en-US" smtClean="0"/>
               <a:t>2026/7/30</a:t>
             </a:fld>
@@ -740,7 +740,7 @@
           <p:cNvPr id="5" name="フッター プレースホルダー 4">
             <a:extLst>
               <a:ext uri="{FF2B5EF4-FFF2-40B4-BE49-F238E27FC236}">
-                <a16:creationId xmlns:a16="http://schemas.microsoft.com/office/drawing/2014/main" id="{487575A7-D0B1-EAC7-136A-083713979DF5}"/>
+                <a16:creationId xmlns:a16="http://schemas.microsoft.com/office/drawing/2014/main" id="{F442471A-5C2D-80E0-09E5-C776EC90A9E8}"/>
               </a:ext>
             </a:extLst>
           </p:cNvPr>
@@ -765,7 +765,7 @@
           <p:cNvPr id="6" name="スライド番号プレースホルダー 5">
             <a:extLst>
               <a:ext uri="{FF2B5EF4-FFF2-40B4-BE49-F238E27FC236}">
-                <a16:creationId xmlns:a16="http://schemas.microsoft.com/office/drawing/2014/main" id="{DCAEF388-4D61-4CF8-153A-F6A1A9619603}"/>
+                <a16:creationId xmlns:a16="http://schemas.microsoft.com/office/drawing/2014/main" id="{EC8DA3BF-F034-58D7-1B4F-C76149120323}"/>
               </a:ext>
             </a:extLst>
           </p:cNvPr>
@@ -781,7 +781,7 @@
           <a:bodyPr/>
           <a:lstStyle/>
           <a:p>
-            <a:fld id="{017CA568-3FE1-4499-AF6E-C401A43EF1CE}" type="slidenum">
+            <a:fld id="{915B4113-59B7-4536-85E5-EAC956EFC6C8}" type="slidenum">
               <a:rPr kumimoji="1" lang="ja-JP" altLang="en-US" smtClean="0"/>
               <a:t>‹#›</a:t>
             </a:fld>
@@ -792,7 +792,7 @@
     </p:spTree>
     <p:extLst>
       <p:ext uri="{BB962C8B-B14F-4D97-AF65-F5344CB8AC3E}">
-        <p14:creationId xmlns:p14="http://schemas.microsoft.com/office/powerpoint/2010/main" val="3577110529"/>
+        <p14:creationId xmlns:p14="http://schemas.microsoft.com/office/powerpoint/2010/main" val="3894435957"/>
       </p:ext>
     </p:extLst>
   </p:cSld>
@@ -824,7 +824,7 @@
           <p:cNvPr id="2" name="タイトル 1">
             <a:extLst>
               <a:ext uri="{FF2B5EF4-FFF2-40B4-BE49-F238E27FC236}">
-                <a16:creationId xmlns:a16="http://schemas.microsoft.com/office/drawing/2014/main" id="{381C7B26-73A9-9BF3-5D87-486AEDEEADC0}"/>
+                <a16:creationId xmlns:a16="http://schemas.microsoft.com/office/drawing/2014/main" id="{62732A95-864D-846A-B7D9-FF2536FF2C93}"/>
               </a:ext>
             </a:extLst>
           </p:cNvPr>
@@ -852,7 +852,7 @@
           <p:cNvPr id="3" name="コンテンツ プレースホルダー 2">
             <a:extLst>
               <a:ext uri="{FF2B5EF4-FFF2-40B4-BE49-F238E27FC236}">
-                <a16:creationId xmlns:a16="http://schemas.microsoft.com/office/drawing/2014/main" id="{8EBD0F03-F463-9CD4-A816-8C0A582A79D7}"/>
+                <a16:creationId xmlns:a16="http://schemas.microsoft.com/office/drawing/2014/main" id="{2363F96A-8364-9AA4-A7D8-0B62F19F4E16}"/>
               </a:ext>
             </a:extLst>
           </p:cNvPr>
@@ -941,7 +941,7 @@
           <p:cNvPr id="4" name="日付プレースホルダー 3">
             <a:extLst>
               <a:ext uri="{FF2B5EF4-FFF2-40B4-BE49-F238E27FC236}">
-                <a16:creationId xmlns:a16="http://schemas.microsoft.com/office/drawing/2014/main" id="{58599F33-F3BC-6B01-B161-AA390DD5FA6D}"/>
+                <a16:creationId xmlns:a16="http://schemas.microsoft.com/office/drawing/2014/main" id="{28DA92CA-0C3B-938C-D051-2A668B7ACDD4}"/>
               </a:ext>
             </a:extLst>
           </p:cNvPr>
@@ -957,7 +957,7 @@
           <a:bodyPr/>
           <a:lstStyle/>
           <a:p>
-            <a:fld id="{C8CCBFA7-525A-4827-A28E-A4D9C57E05D3}" type="datetimeFigureOut">
+            <a:fld id="{E827C3C9-F8F7-4661-9113-BC2CC4621ED4}" type="datetimeFigureOut">
               <a:rPr kumimoji="1" lang="ja-JP" altLang="en-US" smtClean="0"/>
               <a:t>2026/7/30</a:t>
             </a:fld>
@@ -970,7 +970,7 @@
           <p:cNvPr id="5" name="フッター プレースホルダー 4">
             <a:extLst>
               <a:ext uri="{FF2B5EF4-FFF2-40B4-BE49-F238E27FC236}">
-                <a16:creationId xmlns:a16="http://schemas.microsoft.com/office/drawing/2014/main" id="{B122DF68-2838-46BA-2D3C-3050CEDB043F}"/>
+                <a16:creationId xmlns:a16="http://schemas.microsoft.com/office/drawing/2014/main" id="{5182CD09-E19D-E050-D54A-D51568E56779}"/>
               </a:ext>
             </a:extLst>
           </p:cNvPr>
@@ -995,7 +995,7 @@
           <p:cNvPr id="6" name="スライド番号プレースホルダー 5">
             <a:extLst>
               <a:ext uri="{FF2B5EF4-FFF2-40B4-BE49-F238E27FC236}">
-                <a16:creationId xmlns:a16="http://schemas.microsoft.com/office/drawing/2014/main" id="{B355B59D-2218-6829-B236-DDC16D002B87}"/>
+                <a16:creationId xmlns:a16="http://schemas.microsoft.com/office/drawing/2014/main" id="{4E950C21-493C-9F09-39E7-40528D6A93EC}"/>
               </a:ext>
             </a:extLst>
           </p:cNvPr>
@@ -1011,7 +1011,7 @@
           <a:bodyPr/>
           <a:lstStyle/>
           <a:p>
-            <a:fld id="{017CA568-3FE1-4499-AF6E-C401A43EF1CE}" type="slidenum">
+            <a:fld id="{915B4113-59B7-4536-85E5-EAC956EFC6C8}" type="slidenum">
               <a:rPr kumimoji="1" lang="ja-JP" altLang="en-US" smtClean="0"/>
               <a:t>‹#›</a:t>
             </a:fld>
@@ -1022,7 +1022,7 @@
     </p:spTree>
     <p:extLst>
       <p:ext uri="{BB962C8B-B14F-4D97-AF65-F5344CB8AC3E}">
-        <p14:creationId xmlns:p14="http://schemas.microsoft.com/office/powerpoint/2010/main" val="2225477308"/>
+        <p14:creationId xmlns:p14="http://schemas.microsoft.com/office/powerpoint/2010/main" val="2086128823"/>
       </p:ext>
     </p:extLst>
   </p:cSld>
@@ -1054,7 +1054,7 @@
           <p:cNvPr id="2" name="タイトル 1">
             <a:extLst>
               <a:ext uri="{FF2B5EF4-FFF2-40B4-BE49-F238E27FC236}">
-                <a16:creationId xmlns:a16="http://schemas.microsoft.com/office/drawing/2014/main" id="{FC5A2745-CD12-AF9B-5581-8281EE7EE58F}"/>
+                <a16:creationId xmlns:a16="http://schemas.microsoft.com/office/drawing/2014/main" id="{2BD25C5B-493F-1076-A658-E48503E109BA}"/>
               </a:ext>
             </a:extLst>
           </p:cNvPr>
@@ -1091,7 +1091,7 @@
           <p:cNvPr id="3" name="テキスト プレースホルダー 2">
             <a:extLst>
               <a:ext uri="{FF2B5EF4-FFF2-40B4-BE49-F238E27FC236}">
-                <a16:creationId xmlns:a16="http://schemas.microsoft.com/office/drawing/2014/main" id="{B16C5538-3520-60FE-EA23-9D09D83D5997}"/>
+                <a16:creationId xmlns:a16="http://schemas.microsoft.com/office/drawing/2014/main" id="{507C8B0D-4149-5B44-5D5C-6C079BC58017}"/>
               </a:ext>
             </a:extLst>
           </p:cNvPr>
@@ -1216,7 +1216,7 @@
           <p:cNvPr id="4" name="日付プレースホルダー 3">
             <a:extLst>
               <a:ext uri="{FF2B5EF4-FFF2-40B4-BE49-F238E27FC236}">
-                <a16:creationId xmlns:a16="http://schemas.microsoft.com/office/drawing/2014/main" id="{3CA3F51B-5B18-07BC-7B9A-C5DC2D73DC8E}"/>
+                <a16:creationId xmlns:a16="http://schemas.microsoft.com/office/drawing/2014/main" id="{D198E0A6-1BC6-80E5-5E31-B7EA83E85587}"/>
               </a:ext>
             </a:extLst>
           </p:cNvPr>
@@ -1232,7 +1232,7 @@
           <a:bodyPr/>
           <a:lstStyle/>
           <a:p>
-            <a:fld id="{C8CCBFA7-525A-4827-A28E-A4D9C57E05D3}" type="datetimeFigureOut">
+            <a:fld id="{E827C3C9-F8F7-4661-9113-BC2CC4621ED4}" type="datetimeFigureOut">
               <a:rPr kumimoji="1" lang="ja-JP" altLang="en-US" smtClean="0"/>
               <a:t>2026/7/30</a:t>
             </a:fld>
@@ -1245,7 +1245,7 @@
           <p:cNvPr id="5" name="フッター プレースホルダー 4">
             <a:extLst>
               <a:ext uri="{FF2B5EF4-FFF2-40B4-BE49-F238E27FC236}">
-                <a16:creationId xmlns:a16="http://schemas.microsoft.com/office/drawing/2014/main" id="{AAE6AD8A-D154-8C14-56C7-8D539781B49C}"/>
+                <a16:creationId xmlns:a16="http://schemas.microsoft.com/office/drawing/2014/main" id="{CC72C511-0D82-1A06-CE14-B35A4BBA3A4D}"/>
               </a:ext>
             </a:extLst>
           </p:cNvPr>
@@ -1270,7 +1270,7 @@
           <p:cNvPr id="6" name="スライド番号プレースホルダー 5">
             <a:extLst>
               <a:ext uri="{FF2B5EF4-FFF2-40B4-BE49-F238E27FC236}">
-                <a16:creationId xmlns:a16="http://schemas.microsoft.com/office/drawing/2014/main" id="{8DF0EC13-C9ED-C00A-70E8-C386948DD4E1}"/>
+                <a16:creationId xmlns:a16="http://schemas.microsoft.com/office/drawing/2014/main" id="{655133C0-9905-D844-BA49-DA38EDC757CF}"/>
               </a:ext>
             </a:extLst>
           </p:cNvPr>
@@ -1286,7 +1286,7 @@
           <a:bodyPr/>
           <a:lstStyle/>
           <a:p>
-            <a:fld id="{017CA568-3FE1-4499-AF6E-C401A43EF1CE}" type="slidenum">
+            <a:fld id="{915B4113-59B7-4536-85E5-EAC956EFC6C8}" type="slidenum">
               <a:rPr kumimoji="1" lang="ja-JP" altLang="en-US" smtClean="0"/>
               <a:t>‹#›</a:t>
             </a:fld>
@@ -1297,7 +1297,7 @@
     </p:spTree>
     <p:extLst>
       <p:ext uri="{BB962C8B-B14F-4D97-AF65-F5344CB8AC3E}">
-        <p14:creationId xmlns:p14="http://schemas.microsoft.com/office/powerpoint/2010/main" val="2597177012"/>
+        <p14:creationId xmlns:p14="http://schemas.microsoft.com/office/powerpoint/2010/main" val="91494756"/>
       </p:ext>
     </p:extLst>
   </p:cSld>
@@ -1329,7 +1329,7 @@
           <p:cNvPr id="2" name="タイトル 1">
             <a:extLst>
               <a:ext uri="{FF2B5EF4-FFF2-40B4-BE49-F238E27FC236}">
-                <a16:creationId xmlns:a16="http://schemas.microsoft.com/office/drawing/2014/main" id="{3ACAE8F6-934C-31D6-B3E9-BB18F120F494}"/>
+                <a16:creationId xmlns:a16="http://schemas.microsoft.com/office/drawing/2014/main" id="{27077B10-9352-5478-A357-08CDEA042A9A}"/>
               </a:ext>
             </a:extLst>
           </p:cNvPr>
@@ -1357,7 +1357,7 @@
           <p:cNvPr id="3" name="コンテンツ プレースホルダー 2">
             <a:extLst>
               <a:ext uri="{FF2B5EF4-FFF2-40B4-BE49-F238E27FC236}">
-                <a16:creationId xmlns:a16="http://schemas.microsoft.com/office/drawing/2014/main" id="{4D16F886-B70A-F027-21DB-262604421254}"/>
+                <a16:creationId xmlns:a16="http://schemas.microsoft.com/office/drawing/2014/main" id="{915F0E98-FBE2-30F5-9876-FBBCD69C9AFD}"/>
               </a:ext>
             </a:extLst>
           </p:cNvPr>
@@ -1451,7 +1451,7 @@
           <p:cNvPr id="4" name="コンテンツ プレースホルダー 3">
             <a:extLst>
               <a:ext uri="{FF2B5EF4-FFF2-40B4-BE49-F238E27FC236}">
-                <a16:creationId xmlns:a16="http://schemas.microsoft.com/office/drawing/2014/main" id="{C2FEDA6B-6DB0-322C-BCA6-C7EB95EFE16E}"/>
+                <a16:creationId xmlns:a16="http://schemas.microsoft.com/office/drawing/2014/main" id="{4BD70CCA-E423-7502-046E-552345189A3E}"/>
               </a:ext>
             </a:extLst>
           </p:cNvPr>
@@ -1545,7 +1545,7 @@
           <p:cNvPr id="5" name="日付プレースホルダー 4">
             <a:extLst>
               <a:ext uri="{FF2B5EF4-FFF2-40B4-BE49-F238E27FC236}">
-                <a16:creationId xmlns:a16="http://schemas.microsoft.com/office/drawing/2014/main" id="{520C5600-85F1-2CF6-6DFD-46AFE70C322A}"/>
+                <a16:creationId xmlns:a16="http://schemas.microsoft.com/office/drawing/2014/main" id="{A77F1768-EEBF-C4C9-130D-2C50AB6B1E29}"/>
               </a:ext>
             </a:extLst>
           </p:cNvPr>
@@ -1561,7 +1561,7 @@
           <a:bodyPr/>
           <a:lstStyle/>
           <a:p>
-            <a:fld id="{C8CCBFA7-525A-4827-A28E-A4D9C57E05D3}" type="datetimeFigureOut">
+            <a:fld id="{E827C3C9-F8F7-4661-9113-BC2CC4621ED4}" type="datetimeFigureOut">
               <a:rPr kumimoji="1" lang="ja-JP" altLang="en-US" smtClean="0"/>
               <a:t>2026/7/30</a:t>
             </a:fld>
@@ -1574,7 +1574,7 @@
           <p:cNvPr id="6" name="フッター プレースホルダー 5">
             <a:extLst>
               <a:ext uri="{FF2B5EF4-FFF2-40B4-BE49-F238E27FC236}">
-                <a16:creationId xmlns:a16="http://schemas.microsoft.com/office/drawing/2014/main" id="{B49B5054-50DC-8F4B-0F6A-D264812FA3C1}"/>
+                <a16:creationId xmlns:a16="http://schemas.microsoft.com/office/drawing/2014/main" id="{58E3C339-16E5-1ED6-3F18-6ED3C05F4BAB}"/>
               </a:ext>
             </a:extLst>
           </p:cNvPr>
@@ -1599,7 +1599,7 @@
           <p:cNvPr id="7" name="スライド番号プレースホルダー 6">
             <a:extLst>
               <a:ext uri="{FF2B5EF4-FFF2-40B4-BE49-F238E27FC236}">
-                <a16:creationId xmlns:a16="http://schemas.microsoft.com/office/drawing/2014/main" id="{049C4DAC-F4DF-9AAE-14CE-FDD6CB0C06D2}"/>
+                <a16:creationId xmlns:a16="http://schemas.microsoft.com/office/drawing/2014/main" id="{E5B3D381-B4B9-24FA-75EA-34861BAA062B}"/>
               </a:ext>
             </a:extLst>
           </p:cNvPr>
@@ -1615,7 +1615,7 @@
           <a:bodyPr/>
           <a:lstStyle/>
           <a:p>
-            <a:fld id="{017CA568-3FE1-4499-AF6E-C401A43EF1CE}" type="slidenum">
+            <a:fld id="{915B4113-59B7-4536-85E5-EAC956EFC6C8}" type="slidenum">
               <a:rPr kumimoji="1" lang="ja-JP" altLang="en-US" smtClean="0"/>
               <a:t>‹#›</a:t>
             </a:fld>
@@ -1626,7 +1626,7 @@
     </p:spTree>
     <p:extLst>
       <p:ext uri="{BB962C8B-B14F-4D97-AF65-F5344CB8AC3E}">
-        <p14:creationId xmlns:p14="http://schemas.microsoft.com/office/powerpoint/2010/main" val="658912714"/>
+        <p14:creationId xmlns:p14="http://schemas.microsoft.com/office/powerpoint/2010/main" val="3365739211"/>
       </p:ext>
     </p:extLst>
   </p:cSld>
@@ -1658,7 +1658,7 @@
           <p:cNvPr id="2" name="タイトル 1">
             <a:extLst>
               <a:ext uri="{FF2B5EF4-FFF2-40B4-BE49-F238E27FC236}">
-                <a16:creationId xmlns:a16="http://schemas.microsoft.com/office/drawing/2014/main" id="{2137F1A1-9D73-72F3-9B0D-E754A25D3A62}"/>
+                <a16:creationId xmlns:a16="http://schemas.microsoft.com/office/drawing/2014/main" id="{59FBF86F-304C-22A3-DFFB-2201A54D9F21}"/>
               </a:ext>
             </a:extLst>
           </p:cNvPr>
@@ -1691,7 +1691,7 @@
           <p:cNvPr id="3" name="テキスト プレースホルダー 2">
             <a:extLst>
               <a:ext uri="{FF2B5EF4-FFF2-40B4-BE49-F238E27FC236}">
-                <a16:creationId xmlns:a16="http://schemas.microsoft.com/office/drawing/2014/main" id="{AA8D3925-3872-C22C-53AE-3A204D1E2DBA}"/>
+                <a16:creationId xmlns:a16="http://schemas.microsoft.com/office/drawing/2014/main" id="{998B49FE-2F39-5B67-70DA-0F491010D06A}"/>
               </a:ext>
             </a:extLst>
           </p:cNvPr>
@@ -1762,7 +1762,7 @@
           <p:cNvPr id="4" name="コンテンツ プレースホルダー 3">
             <a:extLst>
               <a:ext uri="{FF2B5EF4-FFF2-40B4-BE49-F238E27FC236}">
-                <a16:creationId xmlns:a16="http://schemas.microsoft.com/office/drawing/2014/main" id="{03975495-4CF2-59CB-B509-D2C86A0CEEF4}"/>
+                <a16:creationId xmlns:a16="http://schemas.microsoft.com/office/drawing/2014/main" id="{B3A9A0B4-91CB-E6FD-C07B-CB255DFEF4E2}"/>
               </a:ext>
             </a:extLst>
           </p:cNvPr>
@@ -1856,7 +1856,7 @@
           <p:cNvPr id="5" name="テキスト プレースホルダー 4">
             <a:extLst>
               <a:ext uri="{FF2B5EF4-FFF2-40B4-BE49-F238E27FC236}">
-                <a16:creationId xmlns:a16="http://schemas.microsoft.com/office/drawing/2014/main" id="{154E405D-5C33-FF70-1D10-B6B5502B6321}"/>
+                <a16:creationId xmlns:a16="http://schemas.microsoft.com/office/drawing/2014/main" id="{16970649-9837-13F7-A63E-B8864C425E6A}"/>
               </a:ext>
             </a:extLst>
           </p:cNvPr>
@@ -1927,7 +1927,7 @@
           <p:cNvPr id="6" name="コンテンツ プレースホルダー 5">
             <a:extLst>
               <a:ext uri="{FF2B5EF4-FFF2-40B4-BE49-F238E27FC236}">
-                <a16:creationId xmlns:a16="http://schemas.microsoft.com/office/drawing/2014/main" id="{B8E96ED7-0E12-5CF3-39CF-3EC114968948}"/>
+                <a16:creationId xmlns:a16="http://schemas.microsoft.com/office/drawing/2014/main" id="{5B0DF184-5D6C-6473-039D-1C6509CF682C}"/>
               </a:ext>
             </a:extLst>
           </p:cNvPr>
@@ -2021,7 +2021,7 @@
           <p:cNvPr id="7" name="日付プレースホルダー 6">
             <a:extLst>
               <a:ext uri="{FF2B5EF4-FFF2-40B4-BE49-F238E27FC236}">
-                <a16:creationId xmlns:a16="http://schemas.microsoft.com/office/drawing/2014/main" id="{AC0B1904-FFBD-3968-E4C6-C2BB2286D952}"/>
+                <a16:creationId xmlns:a16="http://schemas.microsoft.com/office/drawing/2014/main" id="{3AA0BFCE-78BC-C1DC-C470-F39905E2A113}"/>
               </a:ext>
             </a:extLst>
           </p:cNvPr>
@@ -2037,7 +2037,7 @@
           <a:bodyPr/>
           <a:lstStyle/>
           <a:p>
-            <a:fld id="{C8CCBFA7-525A-4827-A28E-A4D9C57E05D3}" type="datetimeFigureOut">
+            <a:fld id="{E827C3C9-F8F7-4661-9113-BC2CC4621ED4}" type="datetimeFigureOut">
               <a:rPr kumimoji="1" lang="ja-JP" altLang="en-US" smtClean="0"/>
               <a:t>2026/7/30</a:t>
             </a:fld>
@@ -2050,7 +2050,7 @@
           <p:cNvPr id="8" name="フッター プレースホルダー 7">
             <a:extLst>
               <a:ext uri="{FF2B5EF4-FFF2-40B4-BE49-F238E27FC236}">
-                <a16:creationId xmlns:a16="http://schemas.microsoft.com/office/drawing/2014/main" id="{756555BE-7163-FBD6-E496-D3BED4D2B598}"/>
+                <a16:creationId xmlns:a16="http://schemas.microsoft.com/office/drawing/2014/main" id="{D5A31154-430B-2C39-2FFC-F7D576FA1D68}"/>
               </a:ext>
             </a:extLst>
           </p:cNvPr>
@@ -2075,7 +2075,7 @@
           <p:cNvPr id="9" name="スライド番号プレースホルダー 8">
             <a:extLst>
               <a:ext uri="{FF2B5EF4-FFF2-40B4-BE49-F238E27FC236}">
-                <a16:creationId xmlns:a16="http://schemas.microsoft.com/office/drawing/2014/main" id="{E548CC36-4113-CF5C-5836-25EE136DE8C3}"/>
+                <a16:creationId xmlns:a16="http://schemas.microsoft.com/office/drawing/2014/main" id="{15AF6DDB-28D0-FF40-152C-366B98887A3F}"/>
               </a:ext>
             </a:extLst>
           </p:cNvPr>
@@ -2091,7 +2091,7 @@
           <a:bodyPr/>
           <a:lstStyle/>
           <a:p>
-            <a:fld id="{017CA568-3FE1-4499-AF6E-C401A43EF1CE}" type="slidenum">
+            <a:fld id="{915B4113-59B7-4536-85E5-EAC956EFC6C8}" type="slidenum">
               <a:rPr kumimoji="1" lang="ja-JP" altLang="en-US" smtClean="0"/>
               <a:t>‹#›</a:t>
             </a:fld>
@@ -2102,7 +2102,7 @@
     </p:spTree>
     <p:extLst>
       <p:ext uri="{BB962C8B-B14F-4D97-AF65-F5344CB8AC3E}">
-        <p14:creationId xmlns:p14="http://schemas.microsoft.com/office/powerpoint/2010/main" val="1985407508"/>
+        <p14:creationId xmlns:p14="http://schemas.microsoft.com/office/powerpoint/2010/main" val="3686899545"/>
       </p:ext>
     </p:extLst>
   </p:cSld>
@@ -2134,7 +2134,7 @@
           <p:cNvPr id="2" name="タイトル 1">
             <a:extLst>
               <a:ext uri="{FF2B5EF4-FFF2-40B4-BE49-F238E27FC236}">
-                <a16:creationId xmlns:a16="http://schemas.microsoft.com/office/drawing/2014/main" id="{90E6CE49-FF1E-FB5B-1E27-D29EBAF60D49}"/>
+                <a16:creationId xmlns:a16="http://schemas.microsoft.com/office/drawing/2014/main" id="{FF31396F-F39E-E1AD-D2E9-FCD04BF2101B}"/>
               </a:ext>
             </a:extLst>
           </p:cNvPr>
@@ -2162,7 +2162,7 @@
           <p:cNvPr id="3" name="日付プレースホルダー 2">
             <a:extLst>
               <a:ext uri="{FF2B5EF4-FFF2-40B4-BE49-F238E27FC236}">
-                <a16:creationId xmlns:a16="http://schemas.microsoft.com/office/drawing/2014/main" id="{4F640C89-946F-263B-8929-4111843CF399}"/>
+                <a16:creationId xmlns:a16="http://schemas.microsoft.com/office/drawing/2014/main" id="{B0EB18B5-0521-7F14-055B-D802A595ADA7}"/>
               </a:ext>
             </a:extLst>
           </p:cNvPr>
@@ -2178,7 +2178,7 @@
           <a:bodyPr/>
           <a:lstStyle/>
           <a:p>
-            <a:fld id="{C8CCBFA7-525A-4827-A28E-A4D9C57E05D3}" type="datetimeFigureOut">
+            <a:fld id="{E827C3C9-F8F7-4661-9113-BC2CC4621ED4}" type="datetimeFigureOut">
               <a:rPr kumimoji="1" lang="ja-JP" altLang="en-US" smtClean="0"/>
               <a:t>2026/7/30</a:t>
             </a:fld>
@@ -2191,7 +2191,7 @@
           <p:cNvPr id="4" name="フッター プレースホルダー 3">
             <a:extLst>
               <a:ext uri="{FF2B5EF4-FFF2-40B4-BE49-F238E27FC236}">
-                <a16:creationId xmlns:a16="http://schemas.microsoft.com/office/drawing/2014/main" id="{412615D7-14CF-DC16-C406-9F66A5C19620}"/>
+                <a16:creationId xmlns:a16="http://schemas.microsoft.com/office/drawing/2014/main" id="{2938F649-4222-1290-3601-8723554AC410}"/>
               </a:ext>
             </a:extLst>
           </p:cNvPr>
@@ -2216,7 +2216,7 @@
           <p:cNvPr id="5" name="スライド番号プレースホルダー 4">
             <a:extLst>
               <a:ext uri="{FF2B5EF4-FFF2-40B4-BE49-F238E27FC236}">
-                <a16:creationId xmlns:a16="http://schemas.microsoft.com/office/drawing/2014/main" id="{054622D5-9973-2531-1DE9-209E8691D38F}"/>
+                <a16:creationId xmlns:a16="http://schemas.microsoft.com/office/drawing/2014/main" id="{7865FFFF-1D70-B953-8F0C-A4E2B3DA4D8F}"/>
               </a:ext>
             </a:extLst>
           </p:cNvPr>
@@ -2232,7 +2232,7 @@
           <a:bodyPr/>
           <a:lstStyle/>
           <a:p>
-            <a:fld id="{017CA568-3FE1-4499-AF6E-C401A43EF1CE}" type="slidenum">
+            <a:fld id="{915B4113-59B7-4536-85E5-EAC956EFC6C8}" type="slidenum">
               <a:rPr kumimoji="1" lang="ja-JP" altLang="en-US" smtClean="0"/>
               <a:t>‹#›</a:t>
             </a:fld>
@@ -2243,7 +2243,7 @@
     </p:spTree>
     <p:extLst>
       <p:ext uri="{BB962C8B-B14F-4D97-AF65-F5344CB8AC3E}">
-        <p14:creationId xmlns:p14="http://schemas.microsoft.com/office/powerpoint/2010/main" val="3960358387"/>
+        <p14:creationId xmlns:p14="http://schemas.microsoft.com/office/powerpoint/2010/main" val="1477250143"/>
       </p:ext>
     </p:extLst>
   </p:cSld>
@@ -2275,7 +2275,7 @@
           <p:cNvPr id="2" name="日付プレースホルダー 1">
             <a:extLst>
               <a:ext uri="{FF2B5EF4-FFF2-40B4-BE49-F238E27FC236}">
-                <a16:creationId xmlns:a16="http://schemas.microsoft.com/office/drawing/2014/main" id="{33C875F7-FC86-905E-04C1-DD75064D1296}"/>
+                <a16:creationId xmlns:a16="http://schemas.microsoft.com/office/drawing/2014/main" id="{22E514A5-3572-F375-D36C-3A6A9951DFD3}"/>
               </a:ext>
             </a:extLst>
           </p:cNvPr>
@@ -2291,7 +2291,7 @@
           <a:bodyPr/>
           <a:lstStyle/>
           <a:p>
-            <a:fld id="{C8CCBFA7-525A-4827-A28E-A4D9C57E05D3}" type="datetimeFigureOut">
+            <a:fld id="{E827C3C9-F8F7-4661-9113-BC2CC4621ED4}" type="datetimeFigureOut">
               <a:rPr kumimoji="1" lang="ja-JP" altLang="en-US" smtClean="0"/>
               <a:t>2026/7/30</a:t>
             </a:fld>
@@ -2304,7 +2304,7 @@
           <p:cNvPr id="3" name="フッター プレースホルダー 2">
             <a:extLst>
               <a:ext uri="{FF2B5EF4-FFF2-40B4-BE49-F238E27FC236}">
-                <a16:creationId xmlns:a16="http://schemas.microsoft.com/office/drawing/2014/main" id="{34127740-BFAB-E318-EDA2-1B4B33899D99}"/>
+                <a16:creationId xmlns:a16="http://schemas.microsoft.com/office/drawing/2014/main" id="{5799EC41-E7F7-A550-0A65-15AC05F19C19}"/>
               </a:ext>
             </a:extLst>
           </p:cNvPr>
@@ -2329,7 +2329,7 @@
           <p:cNvPr id="4" name="スライド番号プレースホルダー 3">
             <a:extLst>
               <a:ext uri="{FF2B5EF4-FFF2-40B4-BE49-F238E27FC236}">
-                <a16:creationId xmlns:a16="http://schemas.microsoft.com/office/drawing/2014/main" id="{FE26CC25-C004-A476-EE27-A885930B43CF}"/>
+                <a16:creationId xmlns:a16="http://schemas.microsoft.com/office/drawing/2014/main" id="{817B8B69-8A35-CDF8-854E-A97E4FFB0EDC}"/>
               </a:ext>
             </a:extLst>
           </p:cNvPr>
@@ -2345,7 +2345,7 @@
           <a:bodyPr/>
           <a:lstStyle/>
           <a:p>
-            <a:fld id="{017CA568-3FE1-4499-AF6E-C401A43EF1CE}" type="slidenum">
+            <a:fld id="{915B4113-59B7-4536-85E5-EAC956EFC6C8}" type="slidenum">
               <a:rPr kumimoji="1" lang="ja-JP" altLang="en-US" smtClean="0"/>
               <a:t>‹#›</a:t>
             </a:fld>
@@ -2356,7 +2356,7 @@
     </p:spTree>
     <p:extLst>
       <p:ext uri="{BB962C8B-B14F-4D97-AF65-F5344CB8AC3E}">
-        <p14:creationId xmlns:p14="http://schemas.microsoft.com/office/powerpoint/2010/main" val="496589704"/>
+        <p14:creationId xmlns:p14="http://schemas.microsoft.com/office/powerpoint/2010/main" val="3752225026"/>
       </p:ext>
     </p:extLst>
   </p:cSld>
@@ -2388,7 +2388,7 @@
           <p:cNvPr id="2" name="タイトル 1">
             <a:extLst>
               <a:ext uri="{FF2B5EF4-FFF2-40B4-BE49-F238E27FC236}">
-                <a16:creationId xmlns:a16="http://schemas.microsoft.com/office/drawing/2014/main" id="{D6345A19-FD21-445B-1C01-9D7DEBE96F2E}"/>
+                <a16:creationId xmlns:a16="http://schemas.microsoft.com/office/drawing/2014/main" id="{884E3E4C-2581-F72E-F496-13A1C579641A}"/>
               </a:ext>
             </a:extLst>
           </p:cNvPr>
@@ -2425,7 +2425,7 @@
           <p:cNvPr id="3" name="コンテンツ プレースホルダー 2">
             <a:extLst>
               <a:ext uri="{FF2B5EF4-FFF2-40B4-BE49-F238E27FC236}">
-                <a16:creationId xmlns:a16="http://schemas.microsoft.com/office/drawing/2014/main" id="{00A608C0-87BF-6BC8-766F-EC52B76F3E42}"/>
+                <a16:creationId xmlns:a16="http://schemas.microsoft.com/office/drawing/2014/main" id="{FAD981CF-493D-64AD-5D4B-F8C274B8D0DD}"/>
               </a:ext>
             </a:extLst>
           </p:cNvPr>
@@ -2547,7 +2547,7 @@
           <p:cNvPr id="4" name="テキスト プレースホルダー 3">
             <a:extLst>
               <a:ext uri="{FF2B5EF4-FFF2-40B4-BE49-F238E27FC236}">
-                <a16:creationId xmlns:a16="http://schemas.microsoft.com/office/drawing/2014/main" id="{BD3A1AC7-E78D-E242-8BE3-0B3815249685}"/>
+                <a16:creationId xmlns:a16="http://schemas.microsoft.com/office/drawing/2014/main" id="{C6AB6A38-DACF-07DE-1413-EC1071AD5C6A}"/>
               </a:ext>
             </a:extLst>
           </p:cNvPr>
@@ -2618,7 +2618,7 @@
           <p:cNvPr id="5" name="日付プレースホルダー 4">
             <a:extLst>
               <a:ext uri="{FF2B5EF4-FFF2-40B4-BE49-F238E27FC236}">
-                <a16:creationId xmlns:a16="http://schemas.microsoft.com/office/drawing/2014/main" id="{BBB68FA6-E7A9-9812-881B-A61B9579AAC7}"/>
+                <a16:creationId xmlns:a16="http://schemas.microsoft.com/office/drawing/2014/main" id="{E8B3F6C5-BA49-8604-50A0-C61FDDA4EA67}"/>
               </a:ext>
             </a:extLst>
           </p:cNvPr>
@@ -2634,7 +2634,7 @@
           <a:bodyPr/>
           <a:lstStyle/>
           <a:p>
-            <a:fld id="{C8CCBFA7-525A-4827-A28E-A4D9C57E05D3}" type="datetimeFigureOut">
+            <a:fld id="{E827C3C9-F8F7-4661-9113-BC2CC4621ED4}" type="datetimeFigureOut">
               <a:rPr kumimoji="1" lang="ja-JP" altLang="en-US" smtClean="0"/>
               <a:t>2026/7/30</a:t>
             </a:fld>
@@ -2647,7 +2647,7 @@
           <p:cNvPr id="6" name="フッター プレースホルダー 5">
             <a:extLst>
               <a:ext uri="{FF2B5EF4-FFF2-40B4-BE49-F238E27FC236}">
-                <a16:creationId xmlns:a16="http://schemas.microsoft.com/office/drawing/2014/main" id="{4CF4BA5C-760F-BDEB-75A7-60ABE2BEF6BE}"/>
+                <a16:creationId xmlns:a16="http://schemas.microsoft.com/office/drawing/2014/main" id="{128AC135-FB66-8656-E62B-0D4AC7E776BA}"/>
               </a:ext>
             </a:extLst>
           </p:cNvPr>
@@ -2672,7 +2672,7 @@
           <p:cNvPr id="7" name="スライド番号プレースホルダー 6">
             <a:extLst>
               <a:ext uri="{FF2B5EF4-FFF2-40B4-BE49-F238E27FC236}">
-                <a16:creationId xmlns:a16="http://schemas.microsoft.com/office/drawing/2014/main" id="{0B9555BD-87DC-29B4-E03D-D68F6E478AED}"/>
+                <a16:creationId xmlns:a16="http://schemas.microsoft.com/office/drawing/2014/main" id="{C368BC11-AC20-F11F-118C-4E8FF1DC487C}"/>
               </a:ext>
             </a:extLst>
           </p:cNvPr>
@@ -2688,7 +2688,7 @@
           <a:bodyPr/>
           <a:lstStyle/>
           <a:p>
-            <a:fld id="{017CA568-3FE1-4499-AF6E-C401A43EF1CE}" type="slidenum">
+            <a:fld id="{915B4113-59B7-4536-85E5-EAC956EFC6C8}" type="slidenum">
               <a:rPr kumimoji="1" lang="ja-JP" altLang="en-US" smtClean="0"/>
               <a:t>‹#›</a:t>
             </a:fld>
@@ -2699,7 +2699,7 @@
     </p:spTree>
     <p:extLst>
       <p:ext uri="{BB962C8B-B14F-4D97-AF65-F5344CB8AC3E}">
-        <p14:creationId xmlns:p14="http://schemas.microsoft.com/office/powerpoint/2010/main" val="749133793"/>
+        <p14:creationId xmlns:p14="http://schemas.microsoft.com/office/powerpoint/2010/main" val="3705079305"/>
       </p:ext>
     </p:extLst>
   </p:cSld>
@@ -2731,7 +2731,7 @@
           <p:cNvPr id="2" name="タイトル 1">
             <a:extLst>
               <a:ext uri="{FF2B5EF4-FFF2-40B4-BE49-F238E27FC236}">
-                <a16:creationId xmlns:a16="http://schemas.microsoft.com/office/drawing/2014/main" id="{80FE7DF5-B6BC-A75B-C1D8-1976AC921337}"/>
+                <a16:creationId xmlns:a16="http://schemas.microsoft.com/office/drawing/2014/main" id="{BB5A9161-96DE-E371-9CD9-797C14D8CCFA}"/>
               </a:ext>
             </a:extLst>
           </p:cNvPr>
@@ -2768,7 +2768,7 @@
           <p:cNvPr id="3" name="図プレースホルダー 2">
             <a:extLst>
               <a:ext uri="{FF2B5EF4-FFF2-40B4-BE49-F238E27FC236}">
-                <a16:creationId xmlns:a16="http://schemas.microsoft.com/office/drawing/2014/main" id="{1E35DB7E-9450-4244-A323-B2281E067967}"/>
+                <a16:creationId xmlns:a16="http://schemas.microsoft.com/office/drawing/2014/main" id="{D5CCC0A7-DD4E-0866-8B0C-1EDFF2E95287}"/>
               </a:ext>
             </a:extLst>
           </p:cNvPr>
@@ -2835,7 +2835,7 @@
           <p:cNvPr id="4" name="テキスト プレースホルダー 3">
             <a:extLst>
               <a:ext uri="{FF2B5EF4-FFF2-40B4-BE49-F238E27FC236}">
-                <a16:creationId xmlns:a16="http://schemas.microsoft.com/office/drawing/2014/main" id="{BB31617A-F94E-E76F-933C-028190BABEA7}"/>
+                <a16:creationId xmlns:a16="http://schemas.microsoft.com/office/drawing/2014/main" id="{705DC0B5-8FF9-BE15-E188-A4D6F7B8C37B}"/>
               </a:ext>
             </a:extLst>
           </p:cNvPr>
@@ -2906,7 +2906,7 @@
           <p:cNvPr id="5" name="日付プレースホルダー 4">
             <a:extLst>
               <a:ext uri="{FF2B5EF4-FFF2-40B4-BE49-F238E27FC236}">
-                <a16:creationId xmlns:a16="http://schemas.microsoft.com/office/drawing/2014/main" id="{2055801E-CCB2-EC1F-9BC3-06C196263A86}"/>
+                <a16:creationId xmlns:a16="http://schemas.microsoft.com/office/drawing/2014/main" id="{C19C4CFA-99E0-4F06-A079-BADAF4581D4F}"/>
               </a:ext>
             </a:extLst>
           </p:cNvPr>
@@ -2922,7 +2922,7 @@
           <a:bodyPr/>
           <a:lstStyle/>
           <a:p>
-            <a:fld id="{C8CCBFA7-525A-4827-A28E-A4D9C57E05D3}" type="datetimeFigureOut">
+            <a:fld id="{E827C3C9-F8F7-4661-9113-BC2CC4621ED4}" type="datetimeFigureOut">
               <a:rPr kumimoji="1" lang="ja-JP" altLang="en-US" smtClean="0"/>
               <a:t>2026/7/30</a:t>
             </a:fld>
@@ -2935,7 +2935,7 @@
           <p:cNvPr id="6" name="フッター プレースホルダー 5">
             <a:extLst>
               <a:ext uri="{FF2B5EF4-FFF2-40B4-BE49-F238E27FC236}">
-                <a16:creationId xmlns:a16="http://schemas.microsoft.com/office/drawing/2014/main" id="{B9E2756F-D52A-BE5D-C28B-708AD917A0ED}"/>
+                <a16:creationId xmlns:a16="http://schemas.microsoft.com/office/drawing/2014/main" id="{5C7BC41A-5F29-1991-2D67-9FCD91329F1B}"/>
               </a:ext>
             </a:extLst>
           </p:cNvPr>
@@ -2960,7 +2960,7 @@
           <p:cNvPr id="7" name="スライド番号プレースホルダー 6">
             <a:extLst>
               <a:ext uri="{FF2B5EF4-FFF2-40B4-BE49-F238E27FC236}">
-                <a16:creationId xmlns:a16="http://schemas.microsoft.com/office/drawing/2014/main" id="{BD3DCDE4-1C16-B0C4-C859-17726041CE1D}"/>
+                <a16:creationId xmlns:a16="http://schemas.microsoft.com/office/drawing/2014/main" id="{028B1DE7-F326-EA30-BBC7-B8E51ECD3C30}"/>
               </a:ext>
             </a:extLst>
           </p:cNvPr>
@@ -2976,7 +2976,7 @@
           <a:bodyPr/>
           <a:lstStyle/>
           <a:p>
-            <a:fld id="{017CA568-3FE1-4499-AF6E-C401A43EF1CE}" type="slidenum">
+            <a:fld id="{915B4113-59B7-4536-85E5-EAC956EFC6C8}" type="slidenum">
               <a:rPr kumimoji="1" lang="ja-JP" altLang="en-US" smtClean="0"/>
               <a:t>‹#›</a:t>
             </a:fld>
@@ -2987,7 +2987,7 @@
     </p:spTree>
     <p:extLst>
       <p:ext uri="{BB962C8B-B14F-4D97-AF65-F5344CB8AC3E}">
-        <p14:creationId xmlns:p14="http://schemas.microsoft.com/office/powerpoint/2010/main" val="1371237217"/>
+        <p14:creationId xmlns:p14="http://schemas.microsoft.com/office/powerpoint/2010/main" val="3729304980"/>
       </p:ext>
     </p:extLst>
   </p:cSld>
@@ -3024,7 +3024,7 @@
           <p:cNvPr id="2" name="タイトル プレースホルダー 1">
             <a:extLst>
               <a:ext uri="{FF2B5EF4-FFF2-40B4-BE49-F238E27FC236}">
-                <a16:creationId xmlns:a16="http://schemas.microsoft.com/office/drawing/2014/main" id="{CCE65DD7-088C-D0D4-69AC-39B0883CBAA6}"/>
+                <a16:creationId xmlns:a16="http://schemas.microsoft.com/office/drawing/2014/main" id="{BEFB824D-DD28-3882-5E00-E1CBD0272FC8}"/>
               </a:ext>
             </a:extLst>
           </p:cNvPr>
@@ -3062,7 +3062,7 @@
           <p:cNvPr id="3" name="テキスト プレースホルダー 2">
             <a:extLst>
               <a:ext uri="{FF2B5EF4-FFF2-40B4-BE49-F238E27FC236}">
-                <a16:creationId xmlns:a16="http://schemas.microsoft.com/office/drawing/2014/main" id="{1025D843-0909-E85C-467C-D69DA7D0DB87}"/>
+                <a16:creationId xmlns:a16="http://schemas.microsoft.com/office/drawing/2014/main" id="{CCA3FE54-1D51-B5D4-F795-30A03F233C6C}"/>
               </a:ext>
             </a:extLst>
           </p:cNvPr>
@@ -3161,7 +3161,7 @@
           <p:cNvPr id="4" name="日付プレースホルダー 3">
             <a:extLst>
               <a:ext uri="{FF2B5EF4-FFF2-40B4-BE49-F238E27FC236}">
-                <a16:creationId xmlns:a16="http://schemas.microsoft.com/office/drawing/2014/main" id="{0603C09E-1E1D-AAA7-F2C7-849E0FD4410C}"/>
+                <a16:creationId xmlns:a16="http://schemas.microsoft.com/office/drawing/2014/main" id="{D9C6B33C-D510-2338-0E1B-03C6C102F235}"/>
               </a:ext>
             </a:extLst>
           </p:cNvPr>
@@ -3195,7 +3195,7 @@
             </a:lvl1pPr>
           </a:lstStyle>
           <a:p>
-            <a:fld id="{C8CCBFA7-525A-4827-A28E-A4D9C57E05D3}" type="datetimeFigureOut">
+            <a:fld id="{E827C3C9-F8F7-4661-9113-BC2CC4621ED4}" type="datetimeFigureOut">
               <a:rPr kumimoji="1" lang="ja-JP" altLang="en-US" smtClean="0"/>
               <a:t>2026/7/30</a:t>
             </a:fld>
@@ -3208,7 +3208,7 @@
           <p:cNvPr id="5" name="フッター プレースホルダー 4">
             <a:extLst>
               <a:ext uri="{FF2B5EF4-FFF2-40B4-BE49-F238E27FC236}">
-                <a16:creationId xmlns:a16="http://schemas.microsoft.com/office/drawing/2014/main" id="{2601D414-E949-F87C-6C28-8DC55F498C6B}"/>
+                <a16:creationId xmlns:a16="http://schemas.microsoft.com/office/drawing/2014/main" id="{A53C468A-7F84-258E-0510-05BFC518926B}"/>
               </a:ext>
             </a:extLst>
           </p:cNvPr>
@@ -3251,7 +3251,7 @@
           <p:cNvPr id="6" name="スライド番号プレースホルダー 5">
             <a:extLst>
               <a:ext uri="{FF2B5EF4-FFF2-40B4-BE49-F238E27FC236}">
-                <a16:creationId xmlns:a16="http://schemas.microsoft.com/office/drawing/2014/main" id="{663C5C21-03A2-E327-8579-C5CAE611D9C6}"/>
+                <a16:creationId xmlns:a16="http://schemas.microsoft.com/office/drawing/2014/main" id="{BA093D7D-A3A3-8585-68BE-2B449B194BF7}"/>
               </a:ext>
             </a:extLst>
           </p:cNvPr>
@@ -3285,7 +3285,7 @@
             </a:lvl1pPr>
           </a:lstStyle>
           <a:p>
-            <a:fld id="{017CA568-3FE1-4499-AF6E-C401A43EF1CE}" type="slidenum">
+            <a:fld id="{915B4113-59B7-4536-85E5-EAC956EFC6C8}" type="slidenum">
               <a:rPr kumimoji="1" lang="ja-JP" altLang="en-US" smtClean="0"/>
               <a:t>‹#›</a:t>
             </a:fld>
@@ -3296,7 +3296,7 @@
     </p:spTree>
     <p:extLst>
       <p:ext uri="{BB962C8B-B14F-4D97-AF65-F5344CB8AC3E}">
-        <p14:creationId xmlns:p14="http://schemas.microsoft.com/office/powerpoint/2010/main" val="1992137896"/>
+        <p14:creationId xmlns:p14="http://schemas.microsoft.com/office/powerpoint/2010/main" val="3361526175"/>
       </p:ext>
     </p:extLst>
   </p:cSld>
@@ -3619,7 +3619,7 @@
           <p:cNvPr id="2" name="テキスト ボックス 1">
             <a:extLst>
               <a:ext uri="{FF2B5EF4-FFF2-40B4-BE49-F238E27FC236}">
-                <a16:creationId xmlns:a16="http://schemas.microsoft.com/office/drawing/2014/main" id="{F7A152CB-BFFF-CE15-C677-3986CBA9E996}"/>
+                <a16:creationId xmlns:a16="http://schemas.microsoft.com/office/drawing/2014/main" id="{17C70B4D-15A4-3C05-B0B8-7AA720B718D4}"/>
               </a:ext>
             </a:extLst>
           </p:cNvPr>
@@ -3665,7 +3665,7 @@
           <p:cNvPr id="3" name="テキスト ボックス 2">
             <a:extLst>
               <a:ext uri="{FF2B5EF4-FFF2-40B4-BE49-F238E27FC236}">
-                <a16:creationId xmlns:a16="http://schemas.microsoft.com/office/drawing/2014/main" id="{8ED7D938-3911-7995-D93E-DBDF96976226}"/>
+                <a16:creationId xmlns:a16="http://schemas.microsoft.com/office/drawing/2014/main" id="{74D92C80-72FE-C46B-C33D-2C102C956F11}"/>
               </a:ext>
             </a:extLst>
           </p:cNvPr>
@@ -3714,7 +3714,7 @@
           <p:cNvPr id="4" name="テキスト ボックス 3">
             <a:extLst>
               <a:ext uri="{FF2B5EF4-FFF2-40B4-BE49-F238E27FC236}">
-                <a16:creationId xmlns:a16="http://schemas.microsoft.com/office/drawing/2014/main" id="{7AA3F4F2-BCEA-675C-3B99-6B15A2D4D962}"/>
+                <a16:creationId xmlns:a16="http://schemas.microsoft.com/office/drawing/2014/main" id="{185E81AD-853D-6400-DDBE-ED415F5347D2}"/>
               </a:ext>
             </a:extLst>
           </p:cNvPr>
@@ -3754,7 +3754,7 @@
           <p:cNvPr id="5" name="テキスト ボックス 4">
             <a:extLst>
               <a:ext uri="{FF2B5EF4-FFF2-40B4-BE49-F238E27FC236}">
-                <a16:creationId xmlns:a16="http://schemas.microsoft.com/office/drawing/2014/main" id="{158A5813-4A26-EB39-0DAB-77F889ADD596}"/>
+                <a16:creationId xmlns:a16="http://schemas.microsoft.com/office/drawing/2014/main" id="{2D3CFAAB-0345-4B80-D351-6CCF9950E8AB}"/>
               </a:ext>
             </a:extLst>
           </p:cNvPr>
@@ -3801,7 +3801,7 @@
             <a:hlinkClick r:id="" action="ppaction://media"/>
             <a:extLst>
               <a:ext uri="{FF2B5EF4-FFF2-40B4-BE49-F238E27FC236}">
-                <a16:creationId xmlns:a16="http://schemas.microsoft.com/office/drawing/2014/main" id="{C5D34DAA-5CF3-CCCE-D3C2-6E907A7D094B}"/>
+                <a16:creationId xmlns:a16="http://schemas.microsoft.com/office/drawing/2014/main" id="{E5D310AC-8201-6F29-3BFC-5C46F9820522}"/>
               </a:ext>
             </a:extLst>
           </p:cNvPr>
@@ -3836,7 +3836,7 @@
     </p:spTree>
     <p:extLst>
       <p:ext uri="{BB962C8B-B14F-4D97-AF65-F5344CB8AC3E}">
-        <p14:creationId xmlns:p14="http://schemas.microsoft.com/office/powerpoint/2010/main" val="2415441590"/>
+        <p14:creationId xmlns:p14="http://schemas.microsoft.com/office/powerpoint/2010/main" val="3331543971"/>
       </p:ext>
     </p:extLst>
   </p:cSld>
@@ -3960,7 +3960,7 @@
           <p:cNvPr id="2" name="テキスト ボックス 1">
             <a:extLst>
               <a:ext uri="{FF2B5EF4-FFF2-40B4-BE49-F238E27FC236}">
-                <a16:creationId xmlns:a16="http://schemas.microsoft.com/office/drawing/2014/main" id="{6722DCB5-7D93-EAF3-C9A3-2F5165E434EA}"/>
+                <a16:creationId xmlns:a16="http://schemas.microsoft.com/office/drawing/2014/main" id="{0DABF770-4F06-F4C4-E73F-9A58D9ACA0D1}"/>
               </a:ext>
             </a:extLst>
           </p:cNvPr>
@@ -4006,7 +4006,7 @@
           <p:cNvPr id="3" name="テキスト ボックス 2">
             <a:extLst>
               <a:ext uri="{FF2B5EF4-FFF2-40B4-BE49-F238E27FC236}">
-                <a16:creationId xmlns:a16="http://schemas.microsoft.com/office/drawing/2014/main" id="{5A47A7FB-C323-3B5D-67C3-C2841EB196D5}"/>
+                <a16:creationId xmlns:a16="http://schemas.microsoft.com/office/drawing/2014/main" id="{6D9EB9FF-1E98-1ABC-4311-59428E3DDC43}"/>
               </a:ext>
             </a:extLst>
           </p:cNvPr>
@@ -4046,7 +4046,7 @@
           <p:cNvPr id="4" name="テキスト ボックス 3">
             <a:extLst>
               <a:ext uri="{FF2B5EF4-FFF2-40B4-BE49-F238E27FC236}">
-                <a16:creationId xmlns:a16="http://schemas.microsoft.com/office/drawing/2014/main" id="{C7C6961D-71CD-C9F9-4151-056F083F4831}"/>
+                <a16:creationId xmlns:a16="http://schemas.microsoft.com/office/drawing/2014/main" id="{06D1761B-D6E1-3D4C-670D-06B4C47AC60E}"/>
               </a:ext>
             </a:extLst>
           </p:cNvPr>
@@ -4095,7 +4095,7 @@
           <p:cNvPr id="5" name="テキスト ボックス 4">
             <a:extLst>
               <a:ext uri="{FF2B5EF4-FFF2-40B4-BE49-F238E27FC236}">
-                <a16:creationId xmlns:a16="http://schemas.microsoft.com/office/drawing/2014/main" id="{496807AC-1157-D7F9-144D-E4E8A43BC908}"/>
+                <a16:creationId xmlns:a16="http://schemas.microsoft.com/office/drawing/2014/main" id="{4EF9955A-512A-1F1A-5110-6A45BAFED1B8}"/>
               </a:ext>
             </a:extLst>
           </p:cNvPr>
@@ -4142,7 +4142,7 @@
             <a:hlinkClick r:id="" action="ppaction://media"/>
             <a:extLst>
               <a:ext uri="{FF2B5EF4-FFF2-40B4-BE49-F238E27FC236}">
-                <a16:creationId xmlns:a16="http://schemas.microsoft.com/office/drawing/2014/main" id="{B04D0520-285B-06AC-A469-2B720AE9C404}"/>
+                <a16:creationId xmlns:a16="http://schemas.microsoft.com/office/drawing/2014/main" id="{5C4A669F-7299-65B5-E52D-BE1FFE0EA469}"/>
               </a:ext>
             </a:extLst>
           </p:cNvPr>
@@ -4177,7 +4177,7 @@
     </p:spTree>
     <p:extLst>
       <p:ext uri="{BB962C8B-B14F-4D97-AF65-F5344CB8AC3E}">
-        <p14:creationId xmlns:p14="http://schemas.microsoft.com/office/powerpoint/2010/main" val="1319517418"/>
+        <p14:creationId xmlns:p14="http://schemas.microsoft.com/office/powerpoint/2010/main" val="1816308674"/>
       </p:ext>
     </p:extLst>
   </p:cSld>
@@ -4301,7 +4301,7 @@
           <p:cNvPr id="2" name="テキスト ボックス 1">
             <a:extLst>
               <a:ext uri="{FF2B5EF4-FFF2-40B4-BE49-F238E27FC236}">
-                <a16:creationId xmlns:a16="http://schemas.microsoft.com/office/drawing/2014/main" id="{26E06939-9C7B-92C5-80DB-17B911389D7B}"/>
+                <a16:creationId xmlns:a16="http://schemas.microsoft.com/office/drawing/2014/main" id="{1A287FDD-B063-A5B7-567E-7BE3E5622A57}"/>
               </a:ext>
             </a:extLst>
           </p:cNvPr>
@@ -4347,7 +4347,7 @@
           <p:cNvPr id="3" name="テキスト ボックス 2">
             <a:extLst>
               <a:ext uri="{FF2B5EF4-FFF2-40B4-BE49-F238E27FC236}">
-                <a16:creationId xmlns:a16="http://schemas.microsoft.com/office/drawing/2014/main" id="{F9C12431-7AD3-3B77-4CE7-CE014CC05ED6}"/>
+                <a16:creationId xmlns:a16="http://schemas.microsoft.com/office/drawing/2014/main" id="{B7BB88CE-FA8F-D79C-726B-7A8A00ECC366}"/>
               </a:ext>
             </a:extLst>
           </p:cNvPr>
@@ -4387,7 +4387,7 @@
           <p:cNvPr id="4" name="テキスト ボックス 3">
             <a:extLst>
               <a:ext uri="{FF2B5EF4-FFF2-40B4-BE49-F238E27FC236}">
-                <a16:creationId xmlns:a16="http://schemas.microsoft.com/office/drawing/2014/main" id="{C27E8D87-94EE-798C-6761-00DDEF32B541}"/>
+                <a16:creationId xmlns:a16="http://schemas.microsoft.com/office/drawing/2014/main" id="{E6EEA270-8C4C-F77D-7F51-44B1252AA818}"/>
               </a:ext>
             </a:extLst>
           </p:cNvPr>
@@ -4482,7 +4482,7 @@
           <p:cNvPr id="5" name="テキスト ボックス 4">
             <a:extLst>
               <a:ext uri="{FF2B5EF4-FFF2-40B4-BE49-F238E27FC236}">
-                <a16:creationId xmlns:a16="http://schemas.microsoft.com/office/drawing/2014/main" id="{EA64C8DE-B08D-C321-92A0-539A7198B8B6}"/>
+                <a16:creationId xmlns:a16="http://schemas.microsoft.com/office/drawing/2014/main" id="{22E04AE5-24EC-F55E-747C-B3F4099F2596}"/>
               </a:ext>
             </a:extLst>
           </p:cNvPr>
@@ -4529,7 +4529,7 @@
             <a:hlinkClick r:id="" action="ppaction://media"/>
             <a:extLst>
               <a:ext uri="{FF2B5EF4-FFF2-40B4-BE49-F238E27FC236}">
-                <a16:creationId xmlns:a16="http://schemas.microsoft.com/office/drawing/2014/main" id="{CF962556-E116-6434-067D-2EC47C7774B5}"/>
+                <a16:creationId xmlns:a16="http://schemas.microsoft.com/office/drawing/2014/main" id="{BDE08E36-B22B-0289-9C5B-0F3BA0DA488F}"/>
               </a:ext>
             </a:extLst>
           </p:cNvPr>
@@ -4564,7 +4564,7 @@
     </p:spTree>
     <p:extLst>
       <p:ext uri="{BB962C8B-B14F-4D97-AF65-F5344CB8AC3E}">
-        <p14:creationId xmlns:p14="http://schemas.microsoft.com/office/powerpoint/2010/main" val="3560704462"/>
+        <p14:creationId xmlns:p14="http://schemas.microsoft.com/office/powerpoint/2010/main" val="1936131751"/>
       </p:ext>
     </p:extLst>
   </p:cSld>
@@ -4688,7 +4688,7 @@
           <p:cNvPr id="2" name="テキスト ボックス 1">
             <a:extLst>
               <a:ext uri="{FF2B5EF4-FFF2-40B4-BE49-F238E27FC236}">
-                <a16:creationId xmlns:a16="http://schemas.microsoft.com/office/drawing/2014/main" id="{6C53BCE8-0FC1-051D-E6D5-BB3D2183BD59}"/>
+                <a16:creationId xmlns:a16="http://schemas.microsoft.com/office/drawing/2014/main" id="{DB7CEEA1-2240-CA39-01F2-E869E8F2FFF7}"/>
               </a:ext>
             </a:extLst>
           </p:cNvPr>
@@ -4734,7 +4734,7 @@
           <p:cNvPr id="3" name="テキスト ボックス 2">
             <a:extLst>
               <a:ext uri="{FF2B5EF4-FFF2-40B4-BE49-F238E27FC236}">
-                <a16:creationId xmlns:a16="http://schemas.microsoft.com/office/drawing/2014/main" id="{785D78A1-AB06-DA13-5C66-6A37E09D1AA5}"/>
+                <a16:creationId xmlns:a16="http://schemas.microsoft.com/office/drawing/2014/main" id="{B4DC4B61-F522-A0AD-143D-3E701316B50A}"/>
               </a:ext>
             </a:extLst>
           </p:cNvPr>
@@ -4774,7 +4774,7 @@
           <p:cNvPr id="4" name="テキスト ボックス 3">
             <a:extLst>
               <a:ext uri="{FF2B5EF4-FFF2-40B4-BE49-F238E27FC236}">
-                <a16:creationId xmlns:a16="http://schemas.microsoft.com/office/drawing/2014/main" id="{DE83D459-D905-80B4-AF45-C28B2EAA85E6}"/>
+                <a16:creationId xmlns:a16="http://schemas.microsoft.com/office/drawing/2014/main" id="{FBB1DA37-3D46-BDCC-08B5-EFA6CE8440FC}"/>
               </a:ext>
             </a:extLst>
           </p:cNvPr>
@@ -4884,7 +4884,7 @@
           <p:cNvPr id="5" name="テキスト ボックス 4">
             <a:extLst>
               <a:ext uri="{FF2B5EF4-FFF2-40B4-BE49-F238E27FC236}">
-                <a16:creationId xmlns:a16="http://schemas.microsoft.com/office/drawing/2014/main" id="{A7FC665C-6B5C-A060-B548-913DB50451EA}"/>
+                <a16:creationId xmlns:a16="http://schemas.microsoft.com/office/drawing/2014/main" id="{4F394FEF-A0D8-7C89-E2FD-F49D2B42F26B}"/>
               </a:ext>
             </a:extLst>
           </p:cNvPr>
@@ -4931,7 +4931,7 @@
             <a:hlinkClick r:id="" action="ppaction://media"/>
             <a:extLst>
               <a:ext uri="{FF2B5EF4-FFF2-40B4-BE49-F238E27FC236}">
-                <a16:creationId xmlns:a16="http://schemas.microsoft.com/office/drawing/2014/main" id="{CBBFC175-388C-A7CE-FF39-826D9C05E51A}"/>
+                <a16:creationId xmlns:a16="http://schemas.microsoft.com/office/drawing/2014/main" id="{3A1998F9-54E2-7D56-F7AE-72EAB11DD665}"/>
               </a:ext>
             </a:extLst>
           </p:cNvPr>
@@ -4966,7 +4966,7 @@
     </p:spTree>
     <p:extLst>
       <p:ext uri="{BB962C8B-B14F-4D97-AF65-F5344CB8AC3E}">
-        <p14:creationId xmlns:p14="http://schemas.microsoft.com/office/powerpoint/2010/main" val="2134837121"/>
+        <p14:creationId xmlns:p14="http://schemas.microsoft.com/office/powerpoint/2010/main" val="4054263390"/>
       </p:ext>
     </p:extLst>
   </p:cSld>
@@ -5090,7 +5090,7 @@
           <p:cNvPr id="2" name="テキスト ボックス 1">
             <a:extLst>
               <a:ext uri="{FF2B5EF4-FFF2-40B4-BE49-F238E27FC236}">
-                <a16:creationId xmlns:a16="http://schemas.microsoft.com/office/drawing/2014/main" id="{11F2158E-025D-F810-7BBD-A5D4540AB710}"/>
+                <a16:creationId xmlns:a16="http://schemas.microsoft.com/office/drawing/2014/main" id="{66860A7A-E3E9-795A-05F0-AA0EDC269814}"/>
               </a:ext>
             </a:extLst>
           </p:cNvPr>
@@ -5136,7 +5136,7 @@
           <p:cNvPr id="3" name="テキスト ボックス 2">
             <a:extLst>
               <a:ext uri="{FF2B5EF4-FFF2-40B4-BE49-F238E27FC236}">
-                <a16:creationId xmlns:a16="http://schemas.microsoft.com/office/drawing/2014/main" id="{8EAC8B42-FD2B-72D5-79FA-A03857E5A9C1}"/>
+                <a16:creationId xmlns:a16="http://schemas.microsoft.com/office/drawing/2014/main" id="{264E5A89-C67B-ADA6-C2FE-A04B12C9128A}"/>
               </a:ext>
             </a:extLst>
           </p:cNvPr>
@@ -5176,7 +5176,7 @@
           <p:cNvPr id="4" name="テキスト ボックス 3">
             <a:extLst>
               <a:ext uri="{FF2B5EF4-FFF2-40B4-BE49-F238E27FC236}">
-                <a16:creationId xmlns:a16="http://schemas.microsoft.com/office/drawing/2014/main" id="{0FC4A81B-C809-DB21-C77B-8C50E6346387}"/>
+                <a16:creationId xmlns:a16="http://schemas.microsoft.com/office/drawing/2014/main" id="{3625908B-4B4B-EFFF-8691-4E4C0168DC66}"/>
               </a:ext>
             </a:extLst>
           </p:cNvPr>
@@ -5200,20 +5200,14 @@
           <a:lstStyle/>
           <a:p>
             <a:r>
-              <a:rPr kumimoji="1" lang="en-US" altLang="ja-JP" sz="2000">
+              <a:rPr kumimoji="1" lang="ja-JP" altLang="en-US" sz="2000">
                 <a:solidFill>
                   <a:srgbClr val="333333"/>
                 </a:solidFill>
                 <a:latin typeface="Arial" panose="020B0604020202020204" pitchFamily="34" charset="0"/>
               </a:rPr>
-              <a:t>Add LINE webhook setup for user ID capture</a:t>
-            </a:r>
-            <a:endParaRPr kumimoji="1" lang="ja-JP" altLang="en-US" sz="2000">
-              <a:solidFill>
-                <a:srgbClr val="333333"/>
-              </a:solidFill>
-              <a:latin typeface="Arial" panose="020B0604020202020204" pitchFamily="34" charset="0"/>
-            </a:endParaRPr>
+              <a:t>直近のコミットでは、新機能の追加と実装強化が行われました。</a:t>
+            </a:r>
           </a:p>
         </p:txBody>
       </p:sp>
@@ -5222,7 +5216,7 @@
           <p:cNvPr id="5" name="テキスト ボックス 4">
             <a:extLst>
               <a:ext uri="{FF2B5EF4-FFF2-40B4-BE49-F238E27FC236}">
-                <a16:creationId xmlns:a16="http://schemas.microsoft.com/office/drawing/2014/main" id="{3283D3BB-AD94-C290-2B3D-D690C02B6A18}"/>
+                <a16:creationId xmlns:a16="http://schemas.microsoft.com/office/drawing/2014/main" id="{6349D39B-1DB9-A918-F739-1EDED9061D2F}"/>
               </a:ext>
             </a:extLst>
           </p:cNvPr>
@@ -5269,7 +5263,7 @@
             <a:hlinkClick r:id="" action="ppaction://media"/>
             <a:extLst>
               <a:ext uri="{FF2B5EF4-FFF2-40B4-BE49-F238E27FC236}">
-                <a16:creationId xmlns:a16="http://schemas.microsoft.com/office/drawing/2014/main" id="{8FC45157-A452-20EB-3E81-DFF08E4095E7}"/>
+                <a16:creationId xmlns:a16="http://schemas.microsoft.com/office/drawing/2014/main" id="{CCAA6937-26FA-F44E-978F-58B9180F3D45}"/>
               </a:ext>
             </a:extLst>
           </p:cNvPr>
@@ -5304,7 +5298,7 @@
     </p:spTree>
     <p:extLst>
       <p:ext uri="{BB962C8B-B14F-4D97-AF65-F5344CB8AC3E}">
-        <p14:creationId xmlns:p14="http://schemas.microsoft.com/office/powerpoint/2010/main" val="1461695269"/>
+        <p14:creationId xmlns:p14="http://schemas.microsoft.com/office/powerpoint/2010/main" val="3439888253"/>
       </p:ext>
     </p:extLst>
   </p:cSld>
@@ -5313,10 +5307,10 @@
   </p:clrMapOvr>
   <mc:AlternateContent xmlns:mc="http://schemas.openxmlformats.org/markup-compatibility/2006">
     <mc:Choice xmlns:p14="http://schemas.microsoft.com/office/powerpoint/2010/main" Requires="p14">
-      <p:transition spd="slow" p14:dur="2000" advTm="8000"/>
+      <p:transition spd="slow" p14:dur="2000" advTm="6000"/>
     </mc:Choice>
     <mc:Fallback>
-      <p:transition spd="slow" advTm="8000"/>
+      <p:transition spd="slow" advTm="6000"/>
     </mc:Fallback>
   </mc:AlternateContent>
   <p:timing>
@@ -5347,7 +5341,7 @@
                                   <p:childTnLst>
                                     <p:cmd type="call" cmd="playFrom(0.0)">
                                       <p:cBhvr>
-                                        <p:cTn id="6" dur="7371" fill="hold"/>
+                                        <p:cTn id="6" dur="5687" fill="hold"/>
                                         <p:tgtEl>
                                           <p:spTgt spid="6"/>
                                         </p:tgtEl>
@@ -5428,7 +5422,7 @@
           <p:cNvPr id="2" name="テキスト ボックス 1">
             <a:extLst>
               <a:ext uri="{FF2B5EF4-FFF2-40B4-BE49-F238E27FC236}">
-                <a16:creationId xmlns:a16="http://schemas.microsoft.com/office/drawing/2014/main" id="{7DFFE0D7-0241-9190-198D-FE1ADD205DC5}"/>
+                <a16:creationId xmlns:a16="http://schemas.microsoft.com/office/drawing/2014/main" id="{B397F735-C895-65BB-8BC5-908BDA668020}"/>
               </a:ext>
             </a:extLst>
           </p:cNvPr>
@@ -5474,7 +5468,7 @@
           <p:cNvPr id="3" name="テキスト ボックス 2">
             <a:extLst>
               <a:ext uri="{FF2B5EF4-FFF2-40B4-BE49-F238E27FC236}">
-                <a16:creationId xmlns:a16="http://schemas.microsoft.com/office/drawing/2014/main" id="{FB032A3A-85DF-1195-A7C8-22783536392A}"/>
+                <a16:creationId xmlns:a16="http://schemas.microsoft.com/office/drawing/2014/main" id="{5D81CC9E-E085-2457-7587-F3E5EC9FD04B}"/>
               </a:ext>
             </a:extLst>
           </p:cNvPr>
@@ -5514,7 +5508,7 @@
           <p:cNvPr id="4" name="テキスト ボックス 3">
             <a:extLst>
               <a:ext uri="{FF2B5EF4-FFF2-40B4-BE49-F238E27FC236}">
-                <a16:creationId xmlns:a16="http://schemas.microsoft.com/office/drawing/2014/main" id="{C0EEDEAA-5964-0B07-64BD-C9B1E3F6D44A}"/>
+                <a16:creationId xmlns:a16="http://schemas.microsoft.com/office/drawing/2014/main" id="{BC6E269C-E030-7E13-8101-3E88BAA2CD4F}"/>
               </a:ext>
             </a:extLst>
           </p:cNvPr>
@@ -5579,7 +5573,7 @@
           <p:cNvPr id="5" name="テキスト ボックス 4">
             <a:extLst>
               <a:ext uri="{FF2B5EF4-FFF2-40B4-BE49-F238E27FC236}">
-                <a16:creationId xmlns:a16="http://schemas.microsoft.com/office/drawing/2014/main" id="{2D5688C5-4AC7-306C-46D0-5D5A877DC258}"/>
+                <a16:creationId xmlns:a16="http://schemas.microsoft.com/office/drawing/2014/main" id="{2B433CD3-3419-15CC-E9D4-4DE668EAECEF}"/>
               </a:ext>
             </a:extLst>
           </p:cNvPr>
@@ -5626,7 +5620,7 @@
             <a:hlinkClick r:id="" action="ppaction://media"/>
             <a:extLst>
               <a:ext uri="{FF2B5EF4-FFF2-40B4-BE49-F238E27FC236}">
-                <a16:creationId xmlns:a16="http://schemas.microsoft.com/office/drawing/2014/main" id="{B99A1B3F-FA42-5C8C-4E53-772EEFBE404A}"/>
+                <a16:creationId xmlns:a16="http://schemas.microsoft.com/office/drawing/2014/main" id="{9FFEB395-891E-B4D4-50C7-AF3E71BF50B0}"/>
               </a:ext>
             </a:extLst>
           </p:cNvPr>
@@ -5661,7 +5655,7 @@
     </p:spTree>
     <p:extLst>
       <p:ext uri="{BB962C8B-B14F-4D97-AF65-F5344CB8AC3E}">
-        <p14:creationId xmlns:p14="http://schemas.microsoft.com/office/powerpoint/2010/main" val="3417675877"/>
+        <p14:creationId xmlns:p14="http://schemas.microsoft.com/office/powerpoint/2010/main" val="4186070326"/>
       </p:ext>
     </p:extLst>
   </p:cSld>
